--- a/index/designs/y7-l12/l7-grammar-consolidation/l7-grammar-consolidation.pptx
+++ b/index/designs/y7-l12/l7-grammar-consolidation/l7-grammar-consolidation.pptx
@@ -2336,12 +2336,6 @@
               </a:rPr>
               <a:t>语法</a:t>
             </a:r>
-            <a:pPr algn="ctr" indent="0" marL="0">
-              <a:lnSpc>
-                <a:spcPts val="7260"/>
-              </a:lnSpc>
-              <a:buNone/>
-            </a:pPr>
             <a:r>
               <a:rPr lang="en-US" sz="6600" b="1" dirty="0">
                 <a:solidFill>
@@ -8248,15 +8242,6 @@
               </a:rPr>
               <a:t>You can now match questions to answers and use </a:t>
             </a:r>
-            <a:pPr algn="ctr" indent="0" marL="0">
-              <a:lnSpc>
-                <a:spcPts val="2080"/>
-              </a:lnSpc>
-              <a:spcAft>
-                <a:spcPts val="800"/>
-              </a:spcAft>
-              <a:buNone/>
-            </a:pPr>
             <a:r>
               <a:rPr lang="en-US" sz="1300" b="1" dirty="0">
                 <a:solidFill>
@@ -8268,15 +8253,6 @@
               </a:rPr>
               <a:t>不</a:t>
             </a:r>
-            <a:pPr algn="ctr" indent="0" marL="0">
-              <a:lnSpc>
-                <a:spcPts val="2080"/>
-              </a:lnSpc>
-              <a:spcAft>
-                <a:spcPts val="800"/>
-              </a:spcAft>
-              <a:buNone/>
-            </a:pPr>
             <a:r>
               <a:rPr lang="en-US" sz="1300" dirty="0">
                 <a:solidFill>
@@ -8495,18 +8471,6 @@
               </a:rPr>
               <a:t>Today: </a:t>
             </a:r>
-            <a:pPr algn="ctr" indent="0" marL="0">
-              <a:lnSpc>
-                <a:spcPts val="1920"/>
-              </a:lnSpc>
-              <a:spcBef>
-                <a:spcPts val="1000"/>
-              </a:spcBef>
-              <a:spcAft>
-                <a:spcPts val="1200"/>
-              </a:spcAft>
-              <a:buNone/>
-            </a:pPr>
             <a:r>
               <a:rPr lang="en-US" sz="1200" b="1" dirty="0">
                 <a:solidFill>
@@ -8518,18 +8482,6 @@
               </a:rPr>
               <a:t>问 ⇆ 答 matching</a:t>
             </a:r>
-            <a:pPr algn="ctr" indent="0" marL="0">
-              <a:lnSpc>
-                <a:spcPts val="1920"/>
-              </a:lnSpc>
-              <a:spcBef>
-                <a:spcPts val="1000"/>
-              </a:spcBef>
-              <a:spcAft>
-                <a:spcPts val="1200"/>
-              </a:spcAft>
-              <a:buNone/>
-            </a:pPr>
             <a:r>
               <a:rPr lang="en-US" sz="1200" dirty="0">
                 <a:solidFill>
@@ -8541,18 +8493,6 @@
               </a:rPr>
               <a:t> + </a:t>
             </a:r>
-            <a:pPr algn="ctr" indent="0" marL="0">
-              <a:lnSpc>
-                <a:spcPts val="1920"/>
-              </a:lnSpc>
-              <a:spcBef>
-                <a:spcPts val="1000"/>
-              </a:spcBef>
-              <a:spcAft>
-                <a:spcPts val="1200"/>
-              </a:spcAft>
-              <a:buNone/>
-            </a:pPr>
             <a:r>
               <a:rPr lang="en-US" sz="1200" b="1" dirty="0">
                 <a:solidFill>
@@ -8564,18 +8504,6 @@
               </a:rPr>
               <a:t>不 negation</a:t>
             </a:r>
-            <a:pPr algn="ctr" indent="0" marL="0">
-              <a:lnSpc>
-                <a:spcPts val="1920"/>
-              </a:lnSpc>
-              <a:spcBef>
-                <a:spcPts val="1000"/>
-              </a:spcBef>
-              <a:spcAft>
-                <a:spcPts val="1200"/>
-              </a:spcAft>
-              <a:buNone/>
-            </a:pPr>
             <a:endParaRPr lang="en-US" sz="1200" dirty="0"/>
           </a:p>
           <a:p>
@@ -9058,12 +8986,6 @@
               <a:t>你几点起床？
 </a:t>
             </a:r>
-            <a:pPr algn="l" indent="0" marL="0">
-              <a:lnSpc>
-                <a:spcPts val="1820"/>
-              </a:lnSpc>
-              <a:buNone/>
-            </a:pPr>
             <a:r>
               <a:rPr lang="en-US" sz="1100" dirty="0">
                 <a:solidFill>
@@ -9260,12 +9182,6 @@
               <a:t>你怎么上学？
 </a:t>
             </a:r>
-            <a:pPr algn="l" indent="0" marL="0">
-              <a:lnSpc>
-                <a:spcPts val="1820"/>
-              </a:lnSpc>
-              <a:buNone/>
-            </a:pPr>
             <a:r>
               <a:rPr lang="en-US" sz="1100" dirty="0">
                 <a:solidFill>
@@ -10044,12 +9960,6 @@
               </a:rPr>
               <a:t>We are learning to </a:t>
             </a:r>
-            <a:pPr algn="l" indent="0" marL="0">
-              <a:lnSpc>
-                <a:spcPts val="2100"/>
-              </a:lnSpc>
-              <a:buNone/>
-            </a:pPr>
             <a:r>
               <a:rPr lang="en-US" sz="1500" b="1" dirty="0">
                 <a:solidFill>
@@ -10061,12 +9971,6 @@
               </a:rPr>
               <a:t>match questions to answers</a:t>
             </a:r>
-            <a:pPr algn="l" indent="0" marL="0">
-              <a:lnSpc>
-                <a:spcPts val="2100"/>
-              </a:lnSpc>
-              <a:buNone/>
-            </a:pPr>
             <a:r>
               <a:rPr lang="en-US" sz="1500" dirty="0">
                 <a:solidFill>
@@ -10078,12 +9982,6 @@
               </a:rPr>
               <a:t> and use </a:t>
             </a:r>
-            <a:pPr algn="l" indent="0" marL="0">
-              <a:lnSpc>
-                <a:spcPts val="2100"/>
-              </a:lnSpc>
-              <a:buNone/>
-            </a:pPr>
             <a:r>
               <a:rPr lang="en-US" sz="1500" b="1" dirty="0">
                 <a:solidFill>
@@ -10095,12 +9993,6 @@
               </a:rPr>
               <a:t>negation</a:t>
             </a:r>
-            <a:pPr algn="l" indent="0" marL="0">
-              <a:lnSpc>
-                <a:spcPts val="2100"/>
-              </a:lnSpc>
-              <a:buNone/>
-            </a:pPr>
             <a:r>
               <a:rPr lang="en-US" sz="1500" dirty="0">
                 <a:solidFill>
@@ -10224,9 +10116,6 @@
               </a:rPr>
               <a:t>I can </a:t>
             </a:r>
-            <a:pPr algn="l" indent="0" marL="0">
-              <a:buNone/>
-            </a:pPr>
             <a:r>
               <a:rPr lang="en-US" sz="1400" b="1" dirty="0">
                 <a:solidFill>
@@ -10238,9 +10127,6 @@
               </a:rPr>
               <a:t>match a question to its correct answer</a:t>
             </a:r>
-            <a:pPr algn="l" indent="0" marL="0">
-              <a:buNone/>
-            </a:pPr>
             <a:r>
               <a:rPr lang="en-US" sz="1400" dirty="0">
                 <a:solidFill>
@@ -10403,9 +10289,6 @@
               </a:rPr>
               <a:t>I can </a:t>
             </a:r>
-            <a:pPr algn="l" indent="0" marL="0">
-              <a:buNone/>
-            </a:pPr>
             <a:r>
               <a:rPr lang="en-US" sz="1400" b="1" dirty="0">
                 <a:solidFill>
@@ -10417,9 +10300,6 @@
               </a:rPr>
               <a:t>form the question</a:t>
             </a:r>
-            <a:pPr algn="l" indent="0" marL="0">
-              <a:buNone/>
-            </a:pPr>
             <a:r>
               <a:rPr lang="en-US" sz="1400" dirty="0">
                 <a:solidFill>
@@ -10582,9 +10462,6 @@
               </a:rPr>
               <a:t>I can use </a:t>
             </a:r>
-            <a:pPr algn="l" indent="0" marL="0">
-              <a:buNone/>
-            </a:pPr>
             <a:r>
               <a:rPr lang="en-US" sz="1400" b="1" dirty="0">
                 <a:solidFill>
@@ -10596,9 +10473,6 @@
               </a:rPr>
               <a:t>不</a:t>
             </a:r>
-            <a:pPr algn="l" indent="0" marL="0">
-              <a:buNone/>
-            </a:pPr>
             <a:r>
               <a:rPr lang="en-US" sz="1400" dirty="0">
                 <a:solidFill>
@@ -11074,9 +10948,6 @@
               </a:rPr>
               <a:t>我妈妈</a:t>
             </a:r>
-            <a:pPr algn="l" indent="0" marL="0">
-              <a:buNone/>
-            </a:pPr>
             <a:r>
               <a:rPr lang="en-US" sz="2000" b="1" dirty="0">
                 <a:solidFill>
@@ -11088,9 +10959,6 @@
               </a:rPr>
               <a:t>不</a:t>
             </a:r>
-            <a:pPr algn="l" indent="0" marL="0">
-              <a:buNone/>
-            </a:pPr>
             <a:r>
               <a:rPr lang="en-US" sz="2000" dirty="0">
                 <a:solidFill>
@@ -11141,9 +11009,6 @@
               </a:rPr>
               <a:t>My mum doesn't work. — </a:t>
             </a:r>
-            <a:pPr algn="l" indent="0" marL="0">
-              <a:buNone/>
-            </a:pPr>
             <a:r>
               <a:rPr lang="en-US" sz="1050" b="1" dirty="0">
                 <a:solidFill>
@@ -11155,9 +11020,6 @@
               </a:rPr>
               <a:t>不</a:t>
             </a:r>
-            <a:pPr algn="l" indent="0" marL="0">
-              <a:buNone/>
-            </a:pPr>
             <a:r>
               <a:rPr lang="en-US" sz="1050" dirty="0">
                 <a:solidFill>
@@ -11282,9 +11144,6 @@
               </a:rPr>
               <a:t>不</a:t>
             </a:r>
-            <a:pPr algn="l" indent="0" marL="0">
-              <a:buNone/>
-            </a:pPr>
             <a:r>
               <a:rPr lang="en-US" sz="1500" dirty="0">
                 <a:solidFill>
@@ -11367,9 +11226,6 @@
               </a:rPr>
               <a:t>不</a:t>
             </a:r>
-            <a:pPr algn="l" indent="0" marL="0">
-              <a:buNone/>
-            </a:pPr>
             <a:r>
               <a:rPr lang="en-US" sz="1500" dirty="0">
                 <a:solidFill>
@@ -11452,9 +11308,6 @@
               </a:rPr>
               <a:t>不</a:t>
             </a:r>
-            <a:pPr algn="l" indent="0" marL="0">
-              <a:buNone/>
-            </a:pPr>
             <a:r>
               <a:rPr lang="en-US" sz="1500" dirty="0">
                 <a:solidFill>
@@ -13575,12 +13428,6 @@
               </a:rPr>
               <a:t>我妈妈不工作。</a:t>
             </a:r>
-            <a:pPr algn="l" indent="0" marL="0">
-              <a:lnSpc>
-                <a:spcPts val="2100"/>
-              </a:lnSpc>
-              <a:buNone/>
-            </a:pPr>
             <a:r>
               <a:rPr lang="en-US" sz="1300" dirty="0">
                 <a:solidFill>
@@ -13731,12 +13578,6 @@
               </a:rPr>
               <a:t>Error correction — what's wrong with </a:t>
             </a:r>
-            <a:pPr algn="l" indent="0" marL="0">
-              <a:lnSpc>
-                <a:spcPts val="2100"/>
-              </a:lnSpc>
-              <a:buNone/>
-            </a:pPr>
             <a:r>
               <a:rPr lang="en-US" sz="1500" b="1" dirty="0">
                 <a:solidFill>
@@ -13748,12 +13589,6 @@
               </a:rPr>
               <a:t>我不妈妈工作了解。</a:t>
             </a:r>
-            <a:pPr algn="l" indent="0" marL="0">
-              <a:lnSpc>
-                <a:spcPts val="2100"/>
-              </a:lnSpc>
-              <a:buNone/>
-            </a:pPr>
             <a:r>
               <a:rPr lang="en-US" sz="1300" dirty="0">
                 <a:solidFill>
@@ -13904,12 +13739,6 @@
               </a:rPr>
               <a:t>If the answer is </a:t>
             </a:r>
-            <a:pPr algn="l" indent="0" marL="0">
-              <a:lnSpc>
-                <a:spcPts val="2100"/>
-              </a:lnSpc>
-              <a:buNone/>
-            </a:pPr>
             <a:r>
               <a:rPr lang="en-US" sz="1500" b="1" dirty="0">
                 <a:solidFill>
@@ -13921,12 +13750,6 @@
               </a:rPr>
               <a:t>"开车。"</a:t>
             </a:r>
-            <a:pPr algn="l" indent="0" marL="0">
-              <a:lnSpc>
-                <a:spcPts val="2100"/>
-              </a:lnSpc>
-              <a:buNone/>
-            </a:pPr>
             <a:r>
               <a:rPr lang="en-US" sz="1300" dirty="0">
                 <a:solidFill>
@@ -14515,12 +14338,6 @@
               </a:rPr>
               <a:t>我妈妈不工作。</a:t>
             </a:r>
-            <a:pPr algn="l" indent="0" marL="0">
-              <a:lnSpc>
-                <a:spcPts val="2100"/>
-              </a:lnSpc>
-              <a:buNone/>
-            </a:pPr>
             <a:r>
               <a:rPr lang="en-US" sz="1250" dirty="0">
                 <a:solidFill>
@@ -14710,12 +14527,6 @@
               </a:rPr>
               <a:t>What's wrong with </a:t>
             </a:r>
-            <a:pPr algn="l" indent="0" marL="0">
-              <a:lnSpc>
-                <a:spcPts val="2100"/>
-              </a:lnSpc>
-              <a:buNone/>
-            </a:pPr>
             <a:r>
               <a:rPr lang="en-US" sz="1500" b="1" dirty="0">
                 <a:solidFill>
@@ -14727,12 +14538,6 @@
               </a:rPr>
               <a:t>我不妈妈工作了解。</a:t>
             </a:r>
-            <a:pPr algn="l" indent="0" marL="0">
-              <a:lnSpc>
-                <a:spcPts val="2100"/>
-              </a:lnSpc>
-              <a:buNone/>
-            </a:pPr>
             <a:r>
               <a:rPr lang="en-US" sz="1250" dirty="0">
                 <a:solidFill>
@@ -14922,12 +14727,6 @@
               </a:rPr>
               <a:t>If the answer is </a:t>
             </a:r>
-            <a:pPr algn="l" indent="0" marL="0">
-              <a:lnSpc>
-                <a:spcPts val="2100"/>
-              </a:lnSpc>
-              <a:buNone/>
-            </a:pPr>
             <a:r>
               <a:rPr lang="en-US" sz="1500" b="1" dirty="0">
                 <a:solidFill>
@@ -14939,12 +14738,6 @@
               </a:rPr>
               <a:t>"开车。"</a:t>
             </a:r>
-            <a:pPr algn="l" indent="0" marL="0">
-              <a:lnSpc>
-                <a:spcPts val="2100"/>
-              </a:lnSpc>
-              <a:buNone/>
-            </a:pPr>
             <a:r>
               <a:rPr lang="en-US" sz="1250" dirty="0">
                 <a:solidFill>
